--- a/docs/reports/台灣產業趨勢監測週報_2026-08-24_2026-08-31.pptx
+++ b/docs/reports/台灣產業趨勢監測週報_2026-08-24_2026-08-31.pptx
@@ -183,37 +183,37 @@
                 <c:formatCode>General</c:formatCode>
                 <c:ptCount val="11"/>
                 <c:pt idx="0">
-                  <c:v>25</c:v>
+                  <c:v>27</c:v>
                 </c:pt>
                 <c:pt idx="1">
                   <c:v>122</c:v>
                 </c:pt>
                 <c:pt idx="2">
-                  <c:v>123</c:v>
+                  <c:v>130</c:v>
                 </c:pt>
                 <c:pt idx="3">
-                  <c:v>177</c:v>
+                  <c:v>190</c:v>
                 </c:pt>
                 <c:pt idx="4">
-                  <c:v>195</c:v>
+                  <c:v>204</c:v>
                 </c:pt>
                 <c:pt idx="5">
-                  <c:v>238</c:v>
+                  <c:v>246</c:v>
                 </c:pt>
                 <c:pt idx="6">
-                  <c:v>268</c:v>
+                  <c:v>281</c:v>
                 </c:pt>
                 <c:pt idx="7">
-                  <c:v>352</c:v>
+                  <c:v>360</c:v>
                 </c:pt>
                 <c:pt idx="8">
-                  <c:v>802</c:v>
+                  <c:v>854</c:v>
                 </c:pt>
                 <c:pt idx="9">
-                  <c:v>867</c:v>
+                  <c:v>903</c:v>
                 </c:pt>
                 <c:pt idx="10">
-                  <c:v>960</c:v>
+                  <c:v>1007</c:v>
                 </c:pt>
               </c:numCache>
             </c:numRef>
@@ -329,7 +329,7 @@
                 <c:formatCode>General</c:formatCode>
                 <c:ptCount val="7"/>
                 <c:pt idx="0">
-                  <c:v>22</c:v>
+                  <c:v>23</c:v>
                 </c:pt>
                 <c:pt idx="1">
                   <c:v>10</c:v>
@@ -538,10 +538,10 @@
                 <c:formatCode>General</c:formatCode>
                 <c:ptCount val="6"/>
                 <c:pt idx="0">
-                  <c:v>217</c:v>
+                  <c:v>222</c:v>
                 </c:pt>
                 <c:pt idx="1">
-                  <c:v>199</c:v>
+                  <c:v>204</c:v>
                 </c:pt>
                 <c:pt idx="2">
                   <c:v>47</c:v>
@@ -553,7 +553,7 @@
                   <c:v>19</c:v>
                 </c:pt>
                 <c:pt idx="5">
-                  <c:v>14</c:v>
+                  <c:v>15</c:v>
                 </c:pt>
               </c:numCache>
             </c:numRef>
@@ -3705,7 +3705,7 @@
           </a:p>
           <a:p>
             <a:r>
-              <a:t>產出:2026-08-31 14:28(台北時間)</a:t>
+              <a:t>產出:2026-08-31 18:51(台北時間)</a:t>
             </a:r>
           </a:p>
           <a:p>
@@ -3773,7 +3773,7 @@
               <a:defRPr sz="1600"/>
             </a:pPr>
             <a:r>
-              <a:t>本期共蒐集 8307 篇公開報導,可歸類 4129 篇</a:t>
+              <a:t>本期共蒐集 8703 篇公開報導,可歸類 4324 篇</a:t>
             </a:r>
           </a:p>
           <a:p>
@@ -3781,7 +3781,7 @@
               <a:defRPr sz="1600"/>
             </a:pPr>
             <a:r>
-              <a:t>政府教育單位:960 篇(佔可歸類 23.3%)</a:t>
+              <a:t>政府教育單位:1007 篇(佔可歸類 23.3%)</a:t>
             </a:r>
           </a:p>
           <a:p>
@@ -3789,7 +3789,7 @@
               <a:defRPr sz="1600"/>
             </a:pPr>
             <a:r>
-              <a:t>高科技製造業:867 篇(佔可歸類 21.0%)</a:t>
+              <a:t>高科技製造業:903 篇(佔可歸類 20.9%)</a:t>
             </a:r>
           </a:p>
           <a:p>
@@ -3797,7 +3797,7 @@
               <a:defRPr sz="1600"/>
             </a:pPr>
             <a:r>
-              <a:t>金融業:802 篇(佔可歸類 19.4%)</a:t>
+              <a:t>金融業:854 篇(佔可歸類 19.8%)</a:t>
             </a:r>
           </a:p>
           <a:p>
@@ -3805,7 +3805,7 @@
               <a:defRPr sz="1600"/>
             </a:pPr>
             <a:r>
-              <a:t>最熱主題:AI 與自動化(770 篇)、利率與資金環境(340 篇)、地緣政治與供應鏈(265 篇)</a:t>
+              <a:t>最熱主題:AI 與自動化(816 篇)、利率與資金環境(363 篇)、地緣政治與供應鏈(275 篇)</a:t>
             </a:r>
           </a:p>
           <a:p>
@@ -3909,7 +3909,7 @@
           <a:lstStyle/>
           <a:p>
             <a:r>
-              <a:t>競品聲量對比(SOV)— 電腦品牌(合計 62 篇)</a:t>
+              <a:t>競品聲量對比(SOV)— 電腦品牌(合計 63 篇)</a:t>
             </a:r>
           </a:p>
         </p:txBody>
@@ -3966,7 +3966,7 @@
           <a:lstStyle/>
           <a:p>
             <a:r>
-              <a:t>競品聲量對比(SOV)— 半導體(合計 529 篇)</a:t>
+              <a:t>競品聲量對比(SOV)— 半導體(合計 540 篇)</a:t>
             </a:r>
           </a:p>
         </p:txBody>
@@ -4079,7 +4079,7 @@
               <a:defRPr sz="1600"/>
             </a:pPr>
             <a:r>
-              <a:t>國泰金:疑似負面 3 篇(命中:裁罰)</a:t>
+              <a:t>國泰金:疑似負面 4 篇(命中:裁罰、詐欺)</a:t>
             </a:r>
           </a:p>
           <a:p>
@@ -4095,7 +4095,7 @@
               <a:defRPr sz="1600"/>
             </a:pPr>
             <a:r>
-              <a:t>Google:疑似負面 2 篇(命中:詐騙)</a:t>
+              <a:t>清大:疑似負面 2 篇(命中:爆炸、起訴)</a:t>
             </a:r>
           </a:p>
           <a:p>
@@ -4103,7 +4103,7 @@
               <a:defRPr sz="1600"/>
             </a:pPr>
             <a:r>
-              <a:t>鴻海:疑似負面 2 篇(命中:工安、詐欺、起訴)</a:t>
+              <a:t>Google:疑似負面 2 篇(命中:詐騙)</a:t>
             </a:r>
           </a:p>
           <a:p>

--- a/docs/reports/台灣產業趨勢監測週報_2026-08-24_2026-08-31.pptx
+++ b/docs/reports/台灣產業趨勢監測週報_2026-08-24_2026-08-31.pptx
@@ -186,34 +186,34 @@
                   <c:v>27</c:v>
                 </c:pt>
                 <c:pt idx="1">
-                  <c:v>122</c:v>
+                  <c:v>124</c:v>
                 </c:pt>
                 <c:pt idx="2">
-                  <c:v>130</c:v>
+                  <c:v>131</c:v>
                 </c:pt>
                 <c:pt idx="3">
-                  <c:v>190</c:v>
+                  <c:v>193</c:v>
                 </c:pt>
                 <c:pt idx="4">
-                  <c:v>204</c:v>
+                  <c:v>209</c:v>
                 </c:pt>
                 <c:pt idx="5">
-                  <c:v>246</c:v>
+                  <c:v>251</c:v>
                 </c:pt>
                 <c:pt idx="6">
-                  <c:v>281</c:v>
+                  <c:v>289</c:v>
                 </c:pt>
                 <c:pt idx="7">
-                  <c:v>360</c:v>
+                  <c:v>366</c:v>
                 </c:pt>
                 <c:pt idx="8">
-                  <c:v>854</c:v>
+                  <c:v>864</c:v>
                 </c:pt>
                 <c:pt idx="9">
-                  <c:v>903</c:v>
+                  <c:v>913</c:v>
                 </c:pt>
                 <c:pt idx="10">
-                  <c:v>1007</c:v>
+                  <c:v>1036</c:v>
                 </c:pt>
               </c:numCache>
             </c:numRef>
@@ -341,7 +341,7 @@
                   <c:v>7</c:v>
                 </c:pt>
                 <c:pt idx="4">
-                  <c:v>6</c:v>
+                  <c:v>7</c:v>
                 </c:pt>
                 <c:pt idx="5">
                   <c:v>5</c:v>
@@ -538,10 +538,10 @@
                 <c:formatCode>General</c:formatCode>
                 <c:ptCount val="6"/>
                 <c:pt idx="0">
-                  <c:v>222</c:v>
+                  <c:v>225</c:v>
                 </c:pt>
                 <c:pt idx="1">
-                  <c:v>204</c:v>
+                  <c:v>207</c:v>
                 </c:pt>
                 <c:pt idx="2">
                   <c:v>47</c:v>
@@ -553,7 +553,7 @@
                   <c:v>19</c:v>
                 </c:pt>
                 <c:pt idx="5">
-                  <c:v>15</c:v>
+                  <c:v>16</c:v>
                 </c:pt>
               </c:numCache>
             </c:numRef>
@@ -3705,7 +3705,7 @@
           </a:p>
           <a:p>
             <a:r>
-              <a:t>產出:2026-08-31 18:51(台北時間)</a:t>
+              <a:t>產出:2026-08-31 19:51(台北時間)</a:t>
             </a:r>
           </a:p>
           <a:p>
@@ -3773,7 +3773,7 @@
               <a:defRPr sz="1600"/>
             </a:pPr>
             <a:r>
-              <a:t>本期共蒐集 8703 篇公開報導,可歸類 4324 篇</a:t>
+              <a:t>本期共蒐集 8883 篇公開報導,可歸類 4403 篇</a:t>
             </a:r>
           </a:p>
           <a:p>
@@ -3781,7 +3781,7 @@
               <a:defRPr sz="1600"/>
             </a:pPr>
             <a:r>
-              <a:t>政府教育單位:1007 篇(佔可歸類 23.3%)</a:t>
+              <a:t>政府教育單位:1036 篇(佔可歸類 23.5%)</a:t>
             </a:r>
           </a:p>
           <a:p>
@@ -3789,7 +3789,7 @@
               <a:defRPr sz="1600"/>
             </a:pPr>
             <a:r>
-              <a:t>高科技製造業:903 篇(佔可歸類 20.9%)</a:t>
+              <a:t>高科技製造業:913 篇(佔可歸類 20.7%)</a:t>
             </a:r>
           </a:p>
           <a:p>
@@ -3797,7 +3797,7 @@
               <a:defRPr sz="1600"/>
             </a:pPr>
             <a:r>
-              <a:t>金融業:854 篇(佔可歸類 19.8%)</a:t>
+              <a:t>金融業:864 篇(佔可歸類 19.6%)</a:t>
             </a:r>
           </a:p>
           <a:p>
@@ -3805,7 +3805,7 @@
               <a:defRPr sz="1600"/>
             </a:pPr>
             <a:r>
-              <a:t>最熱主題:AI 與自動化(816 篇)、利率與資金環境(363 篇)、地緣政治與供應鏈(275 篇)</a:t>
+              <a:t>最熱主題:AI 與自動化(835 篇)、利率與資金環境(366 篇)、地緣政治與供應鏈(280 篇)</a:t>
             </a:r>
           </a:p>
           <a:p>
@@ -3909,7 +3909,7 @@
           <a:lstStyle/>
           <a:p>
             <a:r>
-              <a:t>競品聲量對比(SOV)— 電腦品牌(合計 63 篇)</a:t>
+              <a:t>競品聲量對比(SOV)— 電腦品牌(合計 64 篇)</a:t>
             </a:r>
           </a:p>
         </p:txBody>
@@ -3966,7 +3966,7 @@
           <a:lstStyle/>
           <a:p>
             <a:r>
-              <a:t>競品聲量對比(SOV)— 半導體(合計 540 篇)</a:t>
+              <a:t>競品聲量對比(SOV)— 半導體(合計 547 篇)</a:t>
             </a:r>
           </a:p>
         </p:txBody>
@@ -4047,7 +4047,7 @@
               <a:defRPr sz="1600"/>
             </a:pPr>
             <a:r>
-              <a:t>Meta:疑似負面 12 篇(命中:下架、抵制、求償、詐騙)</a:t>
+              <a:t>Meta:疑似負面 13 篇(命中:下架、抵制、求償、詐騙)</a:t>
             </a:r>
           </a:p>
           <a:p>
